--- a/estrategia_dados_supermercados.pptx
+++ b/estrategia_dados_supermercados.pptx
@@ -5,14 +5,15 @@
     <p:sldMasterId id="2147483648" r:id="rId1"/>
   </p:sldMasterIdLst>
   <p:notesMasterIdLst>
-    <p:notesMasterId r:id="rId7"/>
+    <p:notesMasterId r:id="rId8"/>
   </p:notesMasterIdLst>
   <p:sldIdLst>
-    <p:sldId id="258" r:id="rId2"/>
-    <p:sldId id="256" r:id="rId3"/>
-    <p:sldId id="257" r:id="rId4"/>
-    <p:sldId id="259" r:id="rId5"/>
-    <p:sldId id="260" r:id="rId6"/>
+    <p:sldId id="261" r:id="rId2"/>
+    <p:sldId id="258" r:id="rId3"/>
+    <p:sldId id="256" r:id="rId4"/>
+    <p:sldId id="257" r:id="rId5"/>
+    <p:sldId id="259" r:id="rId6"/>
+    <p:sldId id="260" r:id="rId7"/>
   </p:sldIdLst>
   <p:sldSz cx="9144000" cy="5143500" type="screen16x9"/>
   <p:notesSz cx="5143500" cy="9144000"/>
@@ -575,6 +576,126 @@
           <p:cNvPr id="3" name="Imagem 2">
             <a:extLst>
               <a:ext uri="{FF2B5EF4-FFF2-40B4-BE49-F238E27FC236}">
+                <a16:creationId xmlns:a16="http://schemas.microsoft.com/office/drawing/2014/main" id="{007561F0-DEB5-49C3-B36F-3AB2B4885533}"/>
+              </a:ext>
+            </a:extLst>
+          </p:cNvPr>
+          <p:cNvPicPr>
+            <a:picLocks noChangeAspect="1"/>
+          </p:cNvPicPr>
+          <p:nvPr/>
+        </p:nvPicPr>
+        <p:blipFill>
+          <a:blip r:embed="rId2"/>
+          <a:stretch>
+            <a:fillRect/>
+          </a:stretch>
+        </p:blipFill>
+        <p:spPr>
+          <a:xfrm>
+            <a:off x="1" y="0"/>
+            <a:ext cx="4572000" cy="5143500"/>
+          </a:xfrm>
+          <a:prstGeom prst="rect">
+            <a:avLst/>
+          </a:prstGeom>
+        </p:spPr>
+      </p:pic>
+      <p:pic>
+        <p:nvPicPr>
+          <p:cNvPr id="5" name="Imagem 4">
+            <a:extLst>
+              <a:ext uri="{FF2B5EF4-FFF2-40B4-BE49-F238E27FC236}">
+                <a16:creationId xmlns:a16="http://schemas.microsoft.com/office/drawing/2014/main" id="{793F7DE8-561E-4CB2-BE77-167B7725EAA2}"/>
+              </a:ext>
+            </a:extLst>
+          </p:cNvPr>
+          <p:cNvPicPr>
+            <a:picLocks noChangeAspect="1"/>
+          </p:cNvPicPr>
+          <p:nvPr/>
+        </p:nvPicPr>
+        <p:blipFill>
+          <a:blip r:embed="rId3"/>
+          <a:stretch>
+            <a:fillRect/>
+          </a:stretch>
+        </p:blipFill>
+        <p:spPr>
+          <a:xfrm>
+            <a:off x="4572000" y="0"/>
+            <a:ext cx="4572000" cy="2698750"/>
+          </a:xfrm>
+          <a:prstGeom prst="rect">
+            <a:avLst/>
+          </a:prstGeom>
+        </p:spPr>
+      </p:pic>
+      <p:pic>
+        <p:nvPicPr>
+          <p:cNvPr id="7" name="Imagem 6">
+            <a:extLst>
+              <a:ext uri="{FF2B5EF4-FFF2-40B4-BE49-F238E27FC236}">
+                <a16:creationId xmlns:a16="http://schemas.microsoft.com/office/drawing/2014/main" id="{A4CCAF85-AA3B-47A0-8DFD-8C17A4B888F8}"/>
+              </a:ext>
+            </a:extLst>
+          </p:cNvPr>
+          <p:cNvPicPr>
+            <a:picLocks noChangeAspect="1"/>
+          </p:cNvPicPr>
+          <p:nvPr/>
+        </p:nvPicPr>
+        <p:blipFill>
+          <a:blip r:embed="rId4"/>
+          <a:stretch>
+            <a:fillRect/>
+          </a:stretch>
+        </p:blipFill>
+        <p:spPr>
+          <a:xfrm>
+            <a:off x="4571999" y="2698750"/>
+            <a:ext cx="4572000" cy="2444750"/>
+          </a:xfrm>
+          <a:prstGeom prst="rect">
+            <a:avLst/>
+          </a:prstGeom>
+        </p:spPr>
+      </p:pic>
+    </p:spTree>
+    <p:extLst>
+      <p:ext uri="{BB962C8B-B14F-4D97-AF65-F5344CB8AC3E}">
+        <p14:creationId xmlns:p14="http://schemas.microsoft.com/office/powerpoint/2010/main" val="4197235370"/>
+      </p:ext>
+    </p:extLst>
+  </p:cSld>
+  <p:clrMapOvr>
+    <a:masterClrMapping/>
+  </p:clrMapOvr>
+</p:sld>
+</file>
+
+<file path=ppt/slides/slide2.xml><?xml version="1.0" encoding="utf-8"?>
+<p:sld xmlns:a="http://schemas.openxmlformats.org/drawingml/2006/main" xmlns:r="http://schemas.openxmlformats.org/officeDocument/2006/relationships" xmlns:p="http://schemas.openxmlformats.org/presentationml/2006/main">
+  <p:cSld>
+    <p:spTree>
+      <p:nvGrpSpPr>
+        <p:cNvPr id="1" name=""/>
+        <p:cNvGrpSpPr/>
+        <p:nvPr/>
+      </p:nvGrpSpPr>
+      <p:grpSpPr>
+        <a:xfrm>
+          <a:off x="0" y="0"/>
+          <a:ext cx="0" cy="0"/>
+          <a:chOff x="0" y="0"/>
+          <a:chExt cx="0" cy="0"/>
+        </a:xfrm>
+      </p:grpSpPr>
+      <p:pic>
+        <p:nvPicPr>
+          <p:cNvPr id="3" name="Imagem 2">
+            <a:extLst>
+              <a:ext uri="{FF2B5EF4-FFF2-40B4-BE49-F238E27FC236}">
                 <a16:creationId xmlns:a16="http://schemas.microsoft.com/office/drawing/2014/main" id="{0EA8C2CE-9C7C-468E-B508-D3FA7A47ED5F}"/>
               </a:ext>
             </a:extLst>
@@ -613,7 +734,7 @@
 </p:sld>
 </file>
 
-<file path=ppt/slides/slide2.xml><?xml version="1.0" encoding="utf-8"?>
+<file path=ppt/slides/slide3.xml><?xml version="1.0" encoding="utf-8"?>
 <p:sld xmlns:a="http://schemas.openxmlformats.org/drawingml/2006/main" xmlns:r="http://schemas.openxmlformats.org/officeDocument/2006/relationships" xmlns:p="http://schemas.openxmlformats.org/presentationml/2006/main">
   <p:cSld>
     <p:spTree>
@@ -673,7 +794,7 @@
 </p:sld>
 </file>
 
-<file path=ppt/slides/slide3.xml><?xml version="1.0" encoding="utf-8"?>
+<file path=ppt/slides/slide4.xml><?xml version="1.0" encoding="utf-8"?>
 <p:sld xmlns:a="http://schemas.openxmlformats.org/drawingml/2006/main" xmlns:r="http://schemas.openxmlformats.org/officeDocument/2006/relationships" xmlns:p="http://schemas.openxmlformats.org/presentationml/2006/main">
   <p:cSld>
     <p:spTree>
@@ -733,7 +854,7 @@
 </p:sld>
 </file>
 
-<file path=ppt/slides/slide4.xml><?xml version="1.0" encoding="utf-8"?>
+<file path=ppt/slides/slide5.xml><?xml version="1.0" encoding="utf-8"?>
 <p:sld xmlns:a="http://schemas.openxmlformats.org/drawingml/2006/main" xmlns:r="http://schemas.openxmlformats.org/officeDocument/2006/relationships" xmlns:p="http://schemas.openxmlformats.org/presentationml/2006/main">
   <p:cSld>
     <p:spTree>
@@ -793,7 +914,7 @@
 </p:sld>
 </file>
 
-<file path=ppt/slides/slide5.xml><?xml version="1.0" encoding="utf-8"?>
+<file path=ppt/slides/slide6.xml><?xml version="1.0" encoding="utf-8"?>
 <p:sld xmlns:a="http://schemas.openxmlformats.org/drawingml/2006/main" xmlns:r="http://schemas.openxmlformats.org/officeDocument/2006/relationships" xmlns:p="http://schemas.openxmlformats.org/presentationml/2006/main">
   <p:cSld>
     <p:spTree>
